--- a/PKDD_Banking_Analytics_Executive_Deck.pptx
+++ b/PKDD_Banking_Analytics_Executive_Deck.pptx
@@ -1355,7 +1355,7 @@
           </a:prstGeom>
           <a:extLst>
             <a:ext uri="{C572A759-6A51-4108-AA02-DFA0A04FC94B}">
-              <ma14:wrappingTextBoxFlag xmlns:ma14="http://schemas.microsoft.com/office/mac/drawingml/2011/main" xmlns="" val="0"/>
+              <ma14:wrappingTextBoxFlag xmlns="" xmlns:ma14="http://schemas.microsoft.com/office/mac/drawingml/2011/main" val="0"/>
             </a:ext>
           </a:extLst>
         </p:spPr>
@@ -1565,7 +1565,7 @@
           </a:prstGeom>
           <a:extLst>
             <a:ext uri="{C572A759-6A51-4108-AA02-DFA0A04FC94B}">
-              <ma14:wrappingTextBoxFlag xmlns:ma14="http://schemas.microsoft.com/office/mac/drawingml/2011/main" xmlns="" val="0"/>
+              <ma14:wrappingTextBoxFlag xmlns="" xmlns:ma14="http://schemas.microsoft.com/office/mac/drawingml/2011/main" val="0"/>
             </a:ext>
           </a:extLst>
         </p:spPr>
@@ -2966,7 +2966,7 @@
           </a:prstGeom>
           <a:extLst>
             <a:ext uri="{C572A759-6A51-4108-AA02-DFA0A04FC94B}">
-              <ma14:wrappingTextBoxFlag xmlns:ma14="http://schemas.microsoft.com/office/mac/drawingml/2011/main" xmlns="" val="0"/>
+              <ma14:wrappingTextBoxFlag xmlns="" xmlns:ma14="http://schemas.microsoft.com/office/mac/drawingml/2011/main" val="0"/>
             </a:ext>
           </a:extLst>
         </p:spPr>
@@ -3420,7 +3420,7 @@
           </a:prstGeom>
           <a:extLst>
             <a:ext uri="{C572A759-6A51-4108-AA02-DFA0A04FC94B}">
-              <ma14:wrappingTextBoxFlag xmlns:ma14="http://schemas.microsoft.com/office/mac/drawingml/2011/main" xmlns="" val="0"/>
+              <ma14:wrappingTextBoxFlag xmlns="" xmlns:ma14="http://schemas.microsoft.com/office/mac/drawingml/2011/main" val="0"/>
             </a:ext>
           </a:extLst>
         </p:spPr>
@@ -3874,7 +3874,7 @@
           </a:prstGeom>
           <a:extLst>
             <a:ext uri="{C572A759-6A51-4108-AA02-DFA0A04FC94B}">
-              <ma14:wrappingTextBoxFlag xmlns:ma14="http://schemas.microsoft.com/office/mac/drawingml/2011/main" xmlns="" val="0"/>
+              <ma14:wrappingTextBoxFlag xmlns="" xmlns:ma14="http://schemas.microsoft.com/office/mac/drawingml/2011/main" val="0"/>
             </a:ext>
           </a:extLst>
         </p:spPr>
@@ -4328,7 +4328,7 @@
           </a:prstGeom>
           <a:extLst>
             <a:ext uri="{C572A759-6A51-4108-AA02-DFA0A04FC94B}">
-              <ma14:wrappingTextBoxFlag xmlns:ma14="http://schemas.microsoft.com/office/mac/drawingml/2011/main" xmlns="" val="0"/>
+              <ma14:wrappingTextBoxFlag xmlns="" xmlns:ma14="http://schemas.microsoft.com/office/mac/drawingml/2011/main" val="0"/>
             </a:ext>
           </a:extLst>
         </p:spPr>
@@ -4782,7 +4782,7 @@
           </a:prstGeom>
           <a:extLst>
             <a:ext uri="{C572A759-6A51-4108-AA02-DFA0A04FC94B}">
-              <ma14:wrappingTextBoxFlag xmlns:ma14="http://schemas.microsoft.com/office/mac/drawingml/2011/main" xmlns="" val="0"/>
+              <ma14:wrappingTextBoxFlag xmlns="" xmlns:ma14="http://schemas.microsoft.com/office/mac/drawingml/2011/main" val="0"/>
             </a:ext>
           </a:extLst>
         </p:spPr>
@@ -5428,7 +5428,7 @@
           </a:prstGeom>
           <a:extLst>
             <a:ext uri="{C572A759-6A51-4108-AA02-DFA0A04FC94B}">
-              <ma14:wrappingTextBoxFlag xmlns:ma14="http://schemas.microsoft.com/office/mac/drawingml/2011/main" xmlns="" val="0"/>
+              <ma14:wrappingTextBoxFlag xmlns="" xmlns:ma14="http://schemas.microsoft.com/office/mac/drawingml/2011/main" val="0"/>
             </a:ext>
           </a:extLst>
         </p:spPr>
@@ -7200,7 +7200,7 @@
           </a:prstGeom>
           <a:extLst>
             <a:ext uri="{C572A759-6A51-4108-AA02-DFA0A04FC94B}">
-              <ma14:wrappingTextBoxFlag xmlns:ma14="http://schemas.microsoft.com/office/mac/drawingml/2011/main" xmlns="" val="0"/>
+              <ma14:wrappingTextBoxFlag xmlns="" xmlns:ma14="http://schemas.microsoft.com/office/mac/drawingml/2011/main" val="0"/>
             </a:ext>
           </a:extLst>
         </p:spPr>
@@ -8124,7 +8124,9 @@
       </p:sp>
       <p:sp>
         <p:nvSpPr>
-          <p:cNvPr id="26" name="Power BI Q&amp;A launch button label"/>
+          <p:cNvPr id="26" name="Power BI Q&amp;A launch button label">
+            <a:hlinkClick r:id="rId4"/>
+          </p:cNvPr>
           <p:cNvSpPr txBox="1"/>
           <p:nvPr/>
         </p:nvSpPr>
@@ -8152,21 +8154,7 @@
                   <a:schemeClr val="tx2"/>
                 </a:solidFill>
               </a:rPr>
-              <a:t>LAUNCH POWER BI DASHBOARD</a:t>
-            </a:r>
-            <a:endParaRPr lang="en-US" sz="1500" dirty="0"/>
-          </a:p>
-          <a:p>
-            <a:pPr marL="0" indent="0" algn="ctr">
-              <a:buNone/>
-            </a:pPr>
-            <a:r>
-              <a:rPr lang="en-US" sz="1100" dirty="0">
-                <a:solidFill>
-                  <a:schemeClr val="tx2"/>
-                </a:solidFill>
-              </a:rPr>
-              <a:t>[ insert Power BI link here: select button, Ctrl+K ]</a:t>
+              <a:t>LAUNCH STREAMLIT PREDICTIVE ANALYSIS</a:t>
             </a:r>
             <a:endParaRPr lang="en-US" sz="1500" dirty="0"/>
           </a:p>
